--- a/Platforma Databricks.pptx
+++ b/Platforma Databricks.pptx
@@ -17,7 +17,15 @@
     <p:sldId id="265" r:id="rId11"/>
     <p:sldId id="280" r:id="rId12"/>
     <p:sldId id="266" r:id="rId13"/>
-    <p:sldId id="281" r:id="rId14"/>
+    <p:sldId id="267" r:id="rId14"/>
+    <p:sldId id="270" r:id="rId15"/>
+    <p:sldId id="282" r:id="rId16"/>
+    <p:sldId id="271" r:id="rId17"/>
+    <p:sldId id="283" r:id="rId18"/>
+    <p:sldId id="272" r:id="rId19"/>
+    <p:sldId id="273" r:id="rId20"/>
+    <p:sldId id="284" r:id="rId21"/>
+    <p:sldId id="274" r:id="rId22"/>
   </p:sldIdLst>
   <p:sldSz cx="12192000" cy="6858000"/>
   <p:notesSz cx="6858000" cy="9144000"/>
@@ -122,8 +130,7 @@
 <file path=ppt/revisionInfo.xml><?xml version="1.0" encoding="utf-8"?>
 <p1510:revInfo xmlns:a="http://schemas.openxmlformats.org/drawingml/2006/main" xmlns:r="http://schemas.openxmlformats.org/officeDocument/2006/relationships" xmlns:p1510="http://schemas.microsoft.com/office/powerpoint/2015/10/main">
   <p1510:revLst>
-    <p1510:client id="{25D12965-9757-A3EB-6692-BD3B8328738F}" v="19" dt="2026-04-25T05:55:16.015"/>
-    <p1510:client id="{D2155973-B2BE-F126-006D-25FB4BD798C3}" v="265" dt="2026-04-25T05:51:49.545"/>
+    <p1510:client id="{0DC53B21-8E79-98A2-3533-1A6B9BA3E4F4}" v="10" dt="2026-05-09T12:56:40.630"/>
   </p1510:revLst>
 </p1510:revInfo>
 </file>
@@ -257,7 +264,7 @@
           <a:p>
             <a:fld id="{F98AA868-8872-43E4-8C98-D34DABD1FD38}" type="datetimeFigureOut">
               <a:rPr lang="pl-PL" smtClean="0"/>
-              <a:t>24.04.2026</a:t>
+              <a:t>09.05.2026</a:t>
             </a:fld>
             <a:endParaRPr lang="pl-PL"/>
           </a:p>
@@ -425,7 +432,7 @@
           <a:p>
             <a:fld id="{F98AA868-8872-43E4-8C98-D34DABD1FD38}" type="datetimeFigureOut">
               <a:rPr lang="pl-PL" smtClean="0"/>
-              <a:t>24.04.2026</a:t>
+              <a:t>09.05.2026</a:t>
             </a:fld>
             <a:endParaRPr lang="pl-PL"/>
           </a:p>
@@ -603,7 +610,7 @@
           <a:p>
             <a:fld id="{F98AA868-8872-43E4-8C98-D34DABD1FD38}" type="datetimeFigureOut">
               <a:rPr lang="pl-PL" smtClean="0"/>
-              <a:t>24.04.2026</a:t>
+              <a:t>09.05.2026</a:t>
             </a:fld>
             <a:endParaRPr lang="pl-PL"/>
           </a:p>
@@ -771,7 +778,7 @@
           <a:p>
             <a:fld id="{F98AA868-8872-43E4-8C98-D34DABD1FD38}" type="datetimeFigureOut">
               <a:rPr lang="pl-PL" smtClean="0"/>
-              <a:t>24.04.2026</a:t>
+              <a:t>09.05.2026</a:t>
             </a:fld>
             <a:endParaRPr lang="pl-PL"/>
           </a:p>
@@ -1016,7 +1023,7 @@
           <a:p>
             <a:fld id="{F98AA868-8872-43E4-8C98-D34DABD1FD38}" type="datetimeFigureOut">
               <a:rPr lang="pl-PL" smtClean="0"/>
-              <a:t>24.04.2026</a:t>
+              <a:t>09.05.2026</a:t>
             </a:fld>
             <a:endParaRPr lang="pl-PL"/>
           </a:p>
@@ -1245,7 +1252,7 @@
           <a:p>
             <a:fld id="{F98AA868-8872-43E4-8C98-D34DABD1FD38}" type="datetimeFigureOut">
               <a:rPr lang="pl-PL" smtClean="0"/>
-              <a:t>24.04.2026</a:t>
+              <a:t>09.05.2026</a:t>
             </a:fld>
             <a:endParaRPr lang="pl-PL"/>
           </a:p>
@@ -1609,7 +1616,7 @@
           <a:p>
             <a:fld id="{F98AA868-8872-43E4-8C98-D34DABD1FD38}" type="datetimeFigureOut">
               <a:rPr lang="pl-PL" smtClean="0"/>
-              <a:t>24.04.2026</a:t>
+              <a:t>09.05.2026</a:t>
             </a:fld>
             <a:endParaRPr lang="pl-PL"/>
           </a:p>
@@ -1726,7 +1733,7 @@
           <a:p>
             <a:fld id="{F98AA868-8872-43E4-8C98-D34DABD1FD38}" type="datetimeFigureOut">
               <a:rPr lang="pl-PL" smtClean="0"/>
-              <a:t>24.04.2026</a:t>
+              <a:t>09.05.2026</a:t>
             </a:fld>
             <a:endParaRPr lang="pl-PL"/>
           </a:p>
@@ -1821,7 +1828,7 @@
           <a:p>
             <a:fld id="{F98AA868-8872-43E4-8C98-D34DABD1FD38}" type="datetimeFigureOut">
               <a:rPr lang="pl-PL" smtClean="0"/>
-              <a:t>24.04.2026</a:t>
+              <a:t>09.05.2026</a:t>
             </a:fld>
             <a:endParaRPr lang="pl-PL"/>
           </a:p>
@@ -2096,7 +2103,7 @@
           <a:p>
             <a:fld id="{F98AA868-8872-43E4-8C98-D34DABD1FD38}" type="datetimeFigureOut">
               <a:rPr lang="pl-PL" smtClean="0"/>
-              <a:t>24.04.2026</a:t>
+              <a:t>09.05.2026</a:t>
             </a:fld>
             <a:endParaRPr lang="pl-PL"/>
           </a:p>
@@ -2348,7 +2355,7 @@
           <a:p>
             <a:fld id="{F98AA868-8872-43E4-8C98-D34DABD1FD38}" type="datetimeFigureOut">
               <a:rPr lang="pl-PL" smtClean="0"/>
-              <a:t>24.04.2026</a:t>
+              <a:t>09.05.2026</a:t>
             </a:fld>
             <a:endParaRPr lang="pl-PL"/>
           </a:p>
@@ -2559,7 +2566,7 @@
           <a:p>
             <a:fld id="{F98AA868-8872-43E4-8C98-D34DABD1FD38}" type="datetimeFigureOut">
               <a:rPr lang="pl-PL" smtClean="0"/>
-              <a:t>24.04.2026</a:t>
+              <a:t>09.05.2026</a:t>
             </a:fld>
             <a:endParaRPr lang="pl-PL"/>
           </a:p>
@@ -3486,7 +3493,7 @@
           <p:cNvPr id="2" name="Title 1">
             <a:extLst>
               <a:ext uri="{FF2B5EF4-FFF2-40B4-BE49-F238E27FC236}">
-                <a16:creationId xmlns:a16="http://schemas.microsoft.com/office/drawing/2014/main" id="{C9AD31E7-C47A-3CD3-D512-9CAA643418D5}"/>
+                <a16:creationId xmlns:a16="http://schemas.microsoft.com/office/drawing/2014/main" id="{36DE4FA4-CF54-7BA2-C70C-ECA0FAA0530C}"/>
               </a:ext>
             </a:extLst>
           </p:cNvPr>
@@ -3504,7 +3511,7 @@
           <a:p>
             <a:r>
               <a:rPr lang="en-US"/>
-              <a:t>CDN...</a:t>
+              <a:t>UDF</a:t>
             </a:r>
           </a:p>
         </p:txBody>
@@ -3514,7 +3521,7 @@
           <p:cNvPr id="3" name="Content Placeholder 2">
             <a:extLst>
               <a:ext uri="{FF2B5EF4-FFF2-40B4-BE49-F238E27FC236}">
-                <a16:creationId xmlns:a16="http://schemas.microsoft.com/office/drawing/2014/main" id="{77429E1C-F446-1EF6-11B1-25ACF95422AC}"/>
+                <a16:creationId xmlns:a16="http://schemas.microsoft.com/office/drawing/2014/main" id="{1CD5347B-500D-21C7-D4D3-D358ED21E8C7}"/>
               </a:ext>
             </a:extLst>
           </p:cNvPr>
@@ -3527,9 +3534,78 @@
         </p:nvSpPr>
         <p:spPr/>
         <p:txBody>
-          <a:bodyPr/>
-          <a:lstStyle/>
-          <a:p>
+          <a:bodyPr vert="horz" lIns="91440" tIns="45720" rIns="91440" bIns="45720" rtlCol="0" anchor="t">
+            <a:normAutofit/>
+          </a:bodyPr>
+          <a:lstStyle/>
+          <a:p>
+            <a:r>
+              <a:rPr lang="en-US" dirty="0" err="1">
+                <a:ea typeface="+mn-lt"/>
+                <a:cs typeface="+mn-lt"/>
+                <a:hlinkClick r:id="rId2"/>
+              </a:rPr>
+              <a:t>Czym</a:t>
+            </a:r>
+            <a:r>
+              <a:rPr lang="en-US" dirty="0">
+                <a:ea typeface="+mn-lt"/>
+                <a:cs typeface="+mn-lt"/>
+                <a:hlinkClick r:id="rId2"/>
+              </a:rPr>
+              <a:t> są UDF?</a:t>
+            </a:r>
+            <a:endParaRPr lang="en-US" dirty="0">
+              <a:ea typeface="+mn-lt"/>
+              <a:cs typeface="+mn-lt"/>
+            </a:endParaRPr>
+          </a:p>
+          <a:p>
+            <a:r>
+              <a:rPr lang="en-US" dirty="0" err="1">
+                <a:ea typeface="+mn-lt"/>
+                <a:cs typeface="+mn-lt"/>
+              </a:rPr>
+              <a:t>Porównanie</a:t>
+            </a:r>
+            <a:r>
+              <a:rPr lang="en-US" dirty="0">
+                <a:ea typeface="+mn-lt"/>
+                <a:cs typeface="+mn-lt"/>
+              </a:rPr>
+              <a:t> </a:t>
+            </a:r>
+            <a:r>
+              <a:rPr lang="en-US" dirty="0" err="1">
+                <a:ea typeface="+mn-lt"/>
+                <a:cs typeface="+mn-lt"/>
+              </a:rPr>
+              <a:t>wydajności</a:t>
+            </a:r>
+            <a:r>
+              <a:rPr lang="en-US" dirty="0">
+                <a:ea typeface="+mn-lt"/>
+                <a:cs typeface="+mn-lt"/>
+              </a:rPr>
+              <a:t> UDF vs built-in functions</a:t>
+            </a:r>
+            <a:endParaRPr lang="en-US" dirty="0"/>
+          </a:p>
+          <a:p>
+            <a:r>
+              <a:rPr lang="en-US" err="1">
+                <a:ea typeface="+mn-lt"/>
+                <a:cs typeface="+mn-lt"/>
+              </a:rPr>
+              <a:t>Zadania</a:t>
+            </a:r>
+            <a:r>
+              <a:rPr lang="en-US">
+                <a:ea typeface="+mn-lt"/>
+                <a:cs typeface="+mn-lt"/>
+              </a:rPr>
+              <a:t> w notebooku UDF</a:t>
+            </a:r>
             <a:endParaRPr lang="en-US"/>
           </a:p>
         </p:txBody>
@@ -3537,7 +3613,1388 @@
     </p:spTree>
     <p:extLst>
       <p:ext uri="{BB962C8B-B14F-4D97-AF65-F5344CB8AC3E}">
-        <p14:creationId xmlns:p14="http://schemas.microsoft.com/office/powerpoint/2010/main" val="1495358618"/>
+        <p14:creationId xmlns:p14="http://schemas.microsoft.com/office/powerpoint/2010/main" val="1205764438"/>
+      </p:ext>
+    </p:extLst>
+  </p:cSld>
+  <p:clrMapOvr>
+    <a:masterClrMapping/>
+  </p:clrMapOvr>
+</p:sld>
+</file>
+
+<file path=ppt/slides/slide14.xml><?xml version="1.0" encoding="utf-8"?>
+<p:sld xmlns:a="http://schemas.openxmlformats.org/drawingml/2006/main" xmlns:r="http://schemas.openxmlformats.org/officeDocument/2006/relationships" xmlns:p="http://schemas.openxmlformats.org/presentationml/2006/main">
+  <p:cSld>
+    <p:spTree>
+      <p:nvGrpSpPr>
+        <p:cNvPr id="1" name=""/>
+        <p:cNvGrpSpPr/>
+        <p:nvPr/>
+      </p:nvGrpSpPr>
+      <p:grpSpPr>
+        <a:xfrm>
+          <a:off x="0" y="0"/>
+          <a:ext cx="0" cy="0"/>
+          <a:chOff x="0" y="0"/>
+          <a:chExt cx="0" cy="0"/>
+        </a:xfrm>
+      </p:grpSpPr>
+      <p:sp>
+        <p:nvSpPr>
+          <p:cNvPr id="2" name="Title 1">
+            <a:extLst>
+              <a:ext uri="{FF2B5EF4-FFF2-40B4-BE49-F238E27FC236}">
+                <a16:creationId xmlns:a16="http://schemas.microsoft.com/office/drawing/2014/main" id="{7A206135-6F85-F72C-526B-6BE0734A3CCD}"/>
+              </a:ext>
+            </a:extLst>
+          </p:cNvPr>
+          <p:cNvSpPr>
+            <a:spLocks noGrp="1"/>
+          </p:cNvSpPr>
+          <p:nvPr>
+            <p:ph type="title"/>
+          </p:nvPr>
+        </p:nvSpPr>
+        <p:spPr/>
+        <p:txBody>
+          <a:bodyPr/>
+          <a:lstStyle/>
+          <a:p>
+            <a:r>
+              <a:rPr lang="en-US" dirty="0" err="1">
+                <a:ea typeface="+mj-lt"/>
+                <a:cs typeface="+mj-lt"/>
+              </a:rPr>
+              <a:t>Praca</a:t>
+            </a:r>
+            <a:r>
+              <a:rPr lang="en-US" dirty="0">
+                <a:ea typeface="+mj-lt"/>
+                <a:cs typeface="+mj-lt"/>
+              </a:rPr>
+              <a:t> z Delta Lake</a:t>
+            </a:r>
+            <a:endParaRPr lang="en-US" dirty="0"/>
+          </a:p>
+        </p:txBody>
+      </p:sp>
+      <p:sp>
+        <p:nvSpPr>
+          <p:cNvPr id="3" name="Content Placeholder 2">
+            <a:extLst>
+              <a:ext uri="{FF2B5EF4-FFF2-40B4-BE49-F238E27FC236}">
+                <a16:creationId xmlns:a16="http://schemas.microsoft.com/office/drawing/2014/main" id="{54C30E41-4B64-8512-92C1-58C3129B912B}"/>
+              </a:ext>
+            </a:extLst>
+          </p:cNvPr>
+          <p:cNvSpPr>
+            <a:spLocks noGrp="1"/>
+          </p:cNvSpPr>
+          <p:nvPr>
+            <p:ph idx="1"/>
+          </p:nvPr>
+        </p:nvSpPr>
+        <p:spPr/>
+        <p:txBody>
+          <a:bodyPr vert="horz" lIns="91440" tIns="45720" rIns="91440" bIns="45720" rtlCol="0" anchor="t">
+            <a:normAutofit/>
+          </a:bodyPr>
+          <a:lstStyle/>
+          <a:p>
+            <a:r>
+              <a:rPr lang="en-US" dirty="0">
+                <a:ea typeface="+mn-lt"/>
+                <a:cs typeface="+mn-lt"/>
+                <a:hlinkClick r:id="rId2"/>
+              </a:rPr>
+              <a:t>Czym jest Delta Lake w Databricks</a:t>
+            </a:r>
+            <a:endParaRPr lang="en-US"/>
+          </a:p>
+          <a:p>
+            <a:r>
+              <a:rPr lang="en-US" dirty="0">
+                <a:ea typeface="+mn-lt"/>
+                <a:cs typeface="+mn-lt"/>
+                <a:hlinkClick r:id="rId3"/>
+              </a:rPr>
+              <a:t>ACID (Atomicity, Consistency, Isolation, Durability)</a:t>
+            </a:r>
+            <a:endParaRPr lang="en-US"/>
+          </a:p>
+          <a:p>
+            <a:r>
+              <a:rPr lang="en-US" dirty="0" err="1">
+                <a:ea typeface="+mn-lt"/>
+                <a:cs typeface="+mn-lt"/>
+                <a:hlinkClick r:id="rId4"/>
+              </a:rPr>
+              <a:t>Praca</a:t>
+            </a:r>
+            <a:r>
+              <a:rPr lang="en-US" dirty="0">
+                <a:ea typeface="+mn-lt"/>
+                <a:cs typeface="+mn-lt"/>
+                <a:hlinkClick r:id="rId4"/>
+              </a:rPr>
+              <a:t> z </a:t>
+            </a:r>
+            <a:r>
+              <a:rPr lang="en-US" dirty="0" err="1">
+                <a:ea typeface="+mn-lt"/>
+                <a:cs typeface="+mn-lt"/>
+                <a:hlinkClick r:id="rId4"/>
+              </a:rPr>
+              <a:t>historią</a:t>
+            </a:r>
+            <a:r>
+              <a:rPr lang="en-US" dirty="0">
+                <a:ea typeface="+mn-lt"/>
+                <a:cs typeface="+mn-lt"/>
+                <a:hlinkClick r:id="rId4"/>
+              </a:rPr>
+              <a:t> </a:t>
+            </a:r>
+            <a:r>
+              <a:rPr lang="en-US" dirty="0" err="1">
+                <a:ea typeface="+mn-lt"/>
+                <a:cs typeface="+mn-lt"/>
+                <a:hlinkClick r:id="rId4"/>
+              </a:rPr>
+              <a:t>tabeli</a:t>
+            </a:r>
+            <a:r>
+              <a:rPr lang="en-US" dirty="0">
+                <a:ea typeface="+mn-lt"/>
+                <a:cs typeface="+mn-lt"/>
+              </a:rPr>
+              <a:t> </a:t>
+            </a:r>
+          </a:p>
+          <a:p>
+            <a:r>
+              <a:rPr lang="en-US" dirty="0">
+                <a:ea typeface="+mn-lt"/>
+                <a:cs typeface="+mn-lt"/>
+                <a:hlinkClick r:id="rId5"/>
+              </a:rPr>
+              <a:t>Vacuum</a:t>
+            </a:r>
+            <a:endParaRPr lang="en-US" dirty="0">
+              <a:ea typeface="+mn-lt"/>
+              <a:cs typeface="+mn-lt"/>
+            </a:endParaRPr>
+          </a:p>
+          <a:p>
+            <a:r>
+              <a:rPr lang="en-US" dirty="0">
+                <a:ea typeface="+mn-lt"/>
+                <a:cs typeface="+mn-lt"/>
+                <a:hlinkClick r:id="rId6"/>
+              </a:rPr>
+              <a:t>Schema enforcement</a:t>
+            </a:r>
+            <a:r>
+              <a:rPr lang="en-US">
+                <a:ea typeface="+mn-lt"/>
+                <a:cs typeface="+mn-lt"/>
+              </a:rPr>
+              <a:t> &amp; </a:t>
+            </a:r>
+            <a:r>
+              <a:rPr lang="en-US" dirty="0">
+                <a:ea typeface="+mn-lt"/>
+                <a:cs typeface="+mn-lt"/>
+                <a:hlinkClick r:id="rId7"/>
+              </a:rPr>
+              <a:t>evolution</a:t>
+            </a:r>
+            <a:endParaRPr lang="en-US" dirty="0">
+              <a:hlinkClick r:id="rId7"/>
+            </a:endParaRPr>
+          </a:p>
+          <a:p>
+            <a:r>
+              <a:rPr lang="en-US" dirty="0">
+                <a:ea typeface="+mn-lt"/>
+                <a:cs typeface="+mn-lt"/>
+                <a:hlinkClick r:id="rId8"/>
+              </a:rPr>
+              <a:t>Optimize</a:t>
+            </a:r>
+            <a:endParaRPr lang="en-US">
+              <a:ea typeface="+mn-lt"/>
+              <a:cs typeface="+mn-lt"/>
+            </a:endParaRPr>
+          </a:p>
+          <a:p>
+            <a:r>
+              <a:rPr lang="en-US" dirty="0">
+                <a:ea typeface="+mn-lt"/>
+                <a:cs typeface="+mn-lt"/>
+                <a:hlinkClick r:id="rId9"/>
+              </a:rPr>
+              <a:t>Liquid clustering</a:t>
+            </a:r>
+            <a:endParaRPr lang="en-US" dirty="0">
+              <a:ea typeface="+mn-lt"/>
+              <a:cs typeface="+mn-lt"/>
+            </a:endParaRPr>
+          </a:p>
+        </p:txBody>
+      </p:sp>
+    </p:spTree>
+    <p:extLst>
+      <p:ext uri="{BB962C8B-B14F-4D97-AF65-F5344CB8AC3E}">
+        <p14:creationId xmlns:p14="http://schemas.microsoft.com/office/powerpoint/2010/main" val="955711443"/>
+      </p:ext>
+    </p:extLst>
+  </p:cSld>
+  <p:clrMapOvr>
+    <a:masterClrMapping/>
+  </p:clrMapOvr>
+</p:sld>
+</file>
+
+<file path=ppt/slides/slide15.xml><?xml version="1.0" encoding="utf-8"?>
+<p:sld xmlns:a="http://schemas.openxmlformats.org/drawingml/2006/main" xmlns:r="http://schemas.openxmlformats.org/officeDocument/2006/relationships" xmlns:p="http://schemas.openxmlformats.org/presentationml/2006/main">
+  <p:cSld>
+    <p:spTree>
+      <p:nvGrpSpPr>
+        <p:cNvPr id="1" name=""/>
+        <p:cNvGrpSpPr/>
+        <p:nvPr/>
+      </p:nvGrpSpPr>
+      <p:grpSpPr>
+        <a:xfrm>
+          <a:off x="0" y="0"/>
+          <a:ext cx="0" cy="0"/>
+          <a:chOff x="0" y="0"/>
+          <a:chExt cx="0" cy="0"/>
+        </a:xfrm>
+      </p:grpSpPr>
+      <p:sp>
+        <p:nvSpPr>
+          <p:cNvPr id="2" name="Title 1">
+            <a:extLst>
+              <a:ext uri="{FF2B5EF4-FFF2-40B4-BE49-F238E27FC236}">
+                <a16:creationId xmlns:a16="http://schemas.microsoft.com/office/drawing/2014/main" id="{73413D94-D03A-DDBA-B083-2518206DA835}"/>
+              </a:ext>
+            </a:extLst>
+          </p:cNvPr>
+          <p:cNvSpPr>
+            <a:spLocks noGrp="1"/>
+          </p:cNvSpPr>
+          <p:nvPr>
+            <p:ph type="title"/>
+          </p:nvPr>
+        </p:nvSpPr>
+        <p:spPr/>
+        <p:txBody>
+          <a:bodyPr/>
+          <a:lstStyle/>
+          <a:p>
+            <a:r>
+              <a:rPr lang="en-US"/>
+              <a:t>Notebook Delta Lake features</a:t>
+            </a:r>
+          </a:p>
+        </p:txBody>
+      </p:sp>
+      <p:sp>
+        <p:nvSpPr>
+          <p:cNvPr id="3" name="Content Placeholder 2">
+            <a:extLst>
+              <a:ext uri="{FF2B5EF4-FFF2-40B4-BE49-F238E27FC236}">
+                <a16:creationId xmlns:a16="http://schemas.microsoft.com/office/drawing/2014/main" id="{D2BF7784-C257-C7DE-3C74-AE3887DBA93F}"/>
+              </a:ext>
+            </a:extLst>
+          </p:cNvPr>
+          <p:cNvSpPr>
+            <a:spLocks noGrp="1"/>
+          </p:cNvSpPr>
+          <p:nvPr>
+            <p:ph idx="1"/>
+          </p:nvPr>
+        </p:nvSpPr>
+        <p:spPr/>
+        <p:txBody>
+          <a:bodyPr/>
+          <a:lstStyle/>
+          <a:p>
+            <a:endParaRPr lang="en-US"/>
+          </a:p>
+        </p:txBody>
+      </p:sp>
+    </p:spTree>
+    <p:extLst>
+      <p:ext uri="{BB962C8B-B14F-4D97-AF65-F5344CB8AC3E}">
+        <p14:creationId xmlns:p14="http://schemas.microsoft.com/office/powerpoint/2010/main" val="3199924081"/>
+      </p:ext>
+    </p:extLst>
+  </p:cSld>
+  <p:clrMapOvr>
+    <a:masterClrMapping/>
+  </p:clrMapOvr>
+</p:sld>
+</file>
+
+<file path=ppt/slides/slide16.xml><?xml version="1.0" encoding="utf-8"?>
+<p:sld xmlns:a="http://schemas.openxmlformats.org/drawingml/2006/main" xmlns:r="http://schemas.openxmlformats.org/officeDocument/2006/relationships" xmlns:p="http://schemas.openxmlformats.org/presentationml/2006/main">
+  <p:cSld>
+    <p:spTree>
+      <p:nvGrpSpPr>
+        <p:cNvPr id="1" name=""/>
+        <p:cNvGrpSpPr/>
+        <p:nvPr/>
+      </p:nvGrpSpPr>
+      <p:grpSpPr>
+        <a:xfrm>
+          <a:off x="0" y="0"/>
+          <a:ext cx="0" cy="0"/>
+          <a:chOff x="0" y="0"/>
+          <a:chExt cx="0" cy="0"/>
+        </a:xfrm>
+      </p:grpSpPr>
+      <p:sp>
+        <p:nvSpPr>
+          <p:cNvPr id="2" name="Title 1">
+            <a:extLst>
+              <a:ext uri="{FF2B5EF4-FFF2-40B4-BE49-F238E27FC236}">
+                <a16:creationId xmlns:a16="http://schemas.microsoft.com/office/drawing/2014/main" id="{9CCB5AF5-6430-998C-BF7E-86CB35338558}"/>
+              </a:ext>
+            </a:extLst>
+          </p:cNvPr>
+          <p:cNvSpPr>
+            <a:spLocks noGrp="1"/>
+          </p:cNvSpPr>
+          <p:nvPr>
+            <p:ph type="title"/>
+          </p:nvPr>
+        </p:nvSpPr>
+        <p:spPr/>
+        <p:txBody>
+          <a:bodyPr/>
+          <a:lstStyle/>
+          <a:p>
+            <a:r>
+              <a:rPr lang="en-US">
+                <a:ea typeface="+mj-lt"/>
+                <a:cs typeface="+mj-lt"/>
+              </a:rPr>
+              <a:t>Joby</a:t>
+            </a:r>
+            <a:endParaRPr lang="en-US"/>
+          </a:p>
+        </p:txBody>
+      </p:sp>
+      <p:sp>
+        <p:nvSpPr>
+          <p:cNvPr id="3" name="Content Placeholder 2">
+            <a:extLst>
+              <a:ext uri="{FF2B5EF4-FFF2-40B4-BE49-F238E27FC236}">
+                <a16:creationId xmlns:a16="http://schemas.microsoft.com/office/drawing/2014/main" id="{DAED9EB6-E9E3-C762-64B8-C88AC0070DCD}"/>
+              </a:ext>
+            </a:extLst>
+          </p:cNvPr>
+          <p:cNvSpPr>
+            <a:spLocks noGrp="1"/>
+          </p:cNvSpPr>
+          <p:nvPr>
+            <p:ph idx="1"/>
+          </p:nvPr>
+        </p:nvSpPr>
+        <p:spPr/>
+        <p:txBody>
+          <a:bodyPr vert="horz" lIns="91440" tIns="45720" rIns="91440" bIns="45720" rtlCol="0" anchor="t">
+            <a:normAutofit/>
+          </a:bodyPr>
+          <a:lstStyle/>
+          <a:p>
+            <a:r>
+              <a:rPr lang="en-US" dirty="0">
+                <a:ea typeface="+mn-lt"/>
+                <a:cs typeface="+mn-lt"/>
+                <a:hlinkClick r:id="rId2"/>
+              </a:rPr>
+              <a:t>Joby</a:t>
+            </a:r>
+            <a:endParaRPr lang="en-US" dirty="0">
+              <a:ea typeface="+mn-lt"/>
+              <a:cs typeface="+mn-lt"/>
+            </a:endParaRPr>
+          </a:p>
+          <a:p>
+            <a:r>
+              <a:rPr lang="en-US" dirty="0">
+                <a:ea typeface="+mn-lt"/>
+                <a:cs typeface="+mn-lt"/>
+                <a:hlinkClick r:id="rId3"/>
+              </a:rPr>
+              <a:t>Harmonogramy – automatyzacja</a:t>
+            </a:r>
+            <a:endParaRPr lang="en-US" dirty="0">
+              <a:ea typeface="+mn-lt"/>
+              <a:cs typeface="+mn-lt"/>
+            </a:endParaRPr>
+          </a:p>
+          <a:p>
+            <a:r>
+              <a:rPr lang="en-US" dirty="0">
+                <a:ea typeface="+mn-lt"/>
+                <a:cs typeface="+mn-lt"/>
+                <a:hlinkClick r:id="rId4"/>
+              </a:rPr>
+              <a:t>Parametryzacja jobów, wykorzystanie parametrów w notebookach</a:t>
+            </a:r>
+            <a:endParaRPr lang="en-US" dirty="0">
+              <a:ea typeface="+mn-lt"/>
+              <a:cs typeface="+mn-lt"/>
+            </a:endParaRPr>
+          </a:p>
+          <a:p>
+            <a:r>
+              <a:rPr lang="en-US" dirty="0">
+                <a:ea typeface="+mn-lt"/>
+                <a:cs typeface="+mn-lt"/>
+              </a:rPr>
+              <a:t>W </a:t>
+            </a:r>
+            <a:r>
+              <a:rPr lang="en-US" dirty="0" err="1">
+                <a:ea typeface="+mn-lt"/>
+                <a:cs typeface="+mn-lt"/>
+              </a:rPr>
+              <a:t>taskach</a:t>
+            </a:r>
+            <a:r>
+              <a:rPr lang="en-US" dirty="0">
+                <a:ea typeface="+mn-lt"/>
+                <a:cs typeface="+mn-lt"/>
+              </a:rPr>
+              <a:t>:</a:t>
+            </a:r>
+          </a:p>
+          <a:p>
+            <a:pPr lvl="1">
+              <a:buFont typeface="Courier New" panose="020B0604020202020204" pitchFamily="34" charset="0"/>
+              <a:buChar char="o"/>
+            </a:pPr>
+            <a:r>
+              <a:rPr lang="en-US">
+                <a:ea typeface="+mn-lt"/>
+                <a:cs typeface="+mn-lt"/>
+              </a:rPr>
+              <a:t>retry</a:t>
+            </a:r>
+          </a:p>
+          <a:p>
+            <a:pPr lvl="1">
+              <a:buFont typeface="Courier New" panose="020B0604020202020204" pitchFamily="34" charset="0"/>
+              <a:buChar char="o"/>
+            </a:pPr>
+            <a:r>
+              <a:rPr lang="en-US" dirty="0" err="1">
+                <a:ea typeface="+mn-lt"/>
+                <a:cs typeface="+mn-lt"/>
+              </a:rPr>
+              <a:t>Zależności</a:t>
+            </a:r>
+            <a:r>
+              <a:rPr lang="en-US" dirty="0">
+                <a:ea typeface="+mn-lt"/>
+                <a:cs typeface="+mn-lt"/>
+              </a:rPr>
+              <a:t> </a:t>
+            </a:r>
+            <a:r>
+              <a:rPr lang="en-US" dirty="0" err="1">
+                <a:ea typeface="+mn-lt"/>
+                <a:cs typeface="+mn-lt"/>
+              </a:rPr>
+              <a:t>pomiędzy</a:t>
+            </a:r>
+            <a:r>
+              <a:rPr lang="en-US" dirty="0">
+                <a:ea typeface="+mn-lt"/>
+                <a:cs typeface="+mn-lt"/>
+              </a:rPr>
+              <a:t> </a:t>
+            </a:r>
+            <a:r>
+              <a:rPr lang="en-US" dirty="0" err="1">
+                <a:ea typeface="+mn-lt"/>
+                <a:cs typeface="+mn-lt"/>
+              </a:rPr>
+              <a:t>taskami</a:t>
+            </a:r>
+            <a:r>
+              <a:rPr lang="en-US" dirty="0">
+                <a:ea typeface="+mn-lt"/>
+                <a:cs typeface="+mn-lt"/>
+              </a:rPr>
+              <a:t> w </a:t>
+            </a:r>
+            <a:r>
+              <a:rPr lang="en-US" dirty="0" err="1">
+                <a:ea typeface="+mn-lt"/>
+                <a:cs typeface="+mn-lt"/>
+              </a:rPr>
+              <a:t>jobie</a:t>
+            </a:r>
+            <a:endParaRPr lang="en-US" dirty="0"/>
+          </a:p>
+          <a:p>
+            <a:pPr lvl="1">
+              <a:buFont typeface="Courier New" panose="020B0604020202020204" pitchFamily="34" charset="0"/>
+              <a:buChar char="o"/>
+            </a:pPr>
+            <a:r>
+              <a:rPr lang="en-US" dirty="0" err="1">
+                <a:ea typeface="+mn-lt"/>
+                <a:cs typeface="+mn-lt"/>
+              </a:rPr>
+              <a:t>Też</a:t>
+            </a:r>
+            <a:r>
+              <a:rPr lang="en-US" dirty="0">
+                <a:ea typeface="+mn-lt"/>
+                <a:cs typeface="+mn-lt"/>
+              </a:rPr>
+              <a:t> </a:t>
+            </a:r>
+            <a:r>
+              <a:rPr lang="en-US" dirty="0" err="1">
+                <a:ea typeface="+mn-lt"/>
+                <a:cs typeface="+mn-lt"/>
+              </a:rPr>
+              <a:t>są</a:t>
+            </a:r>
+            <a:r>
+              <a:rPr lang="en-US" dirty="0">
+                <a:ea typeface="+mn-lt"/>
+                <a:cs typeface="+mn-lt"/>
+              </a:rPr>
+              <a:t> </a:t>
+            </a:r>
+            <a:r>
+              <a:rPr lang="en-US" dirty="0" err="1">
+                <a:ea typeface="+mn-lt"/>
+                <a:cs typeface="+mn-lt"/>
+              </a:rPr>
+              <a:t>parametry</a:t>
+            </a:r>
+            <a:r>
+              <a:rPr lang="en-US" dirty="0">
+                <a:ea typeface="+mn-lt"/>
+                <a:cs typeface="+mn-lt"/>
+              </a:rPr>
+              <a:t> – o </a:t>
+            </a:r>
+            <a:r>
+              <a:rPr lang="en-US" dirty="0" err="1">
+                <a:ea typeface="+mn-lt"/>
+                <a:cs typeface="+mn-lt"/>
+              </a:rPr>
+              <a:t>mniejszej</a:t>
+            </a:r>
+            <a:r>
+              <a:rPr lang="en-US" dirty="0">
+                <a:ea typeface="+mn-lt"/>
+                <a:cs typeface="+mn-lt"/>
+              </a:rPr>
+              <a:t> </a:t>
+            </a:r>
+            <a:r>
+              <a:rPr lang="en-US" dirty="0" err="1">
+                <a:ea typeface="+mn-lt"/>
+                <a:cs typeface="+mn-lt"/>
+              </a:rPr>
+              <a:t>randze</a:t>
+            </a:r>
+            <a:r>
+              <a:rPr lang="en-US" dirty="0">
+                <a:ea typeface="+mn-lt"/>
+                <a:cs typeface="+mn-lt"/>
+              </a:rPr>
+              <a:t> </a:t>
+            </a:r>
+            <a:r>
+              <a:rPr lang="en-US" dirty="0" err="1">
+                <a:ea typeface="+mn-lt"/>
+                <a:cs typeface="+mn-lt"/>
+              </a:rPr>
+              <a:t>niż</a:t>
+            </a:r>
+            <a:r>
+              <a:rPr lang="en-US" dirty="0">
+                <a:ea typeface="+mn-lt"/>
+                <a:cs typeface="+mn-lt"/>
+              </a:rPr>
+              <a:t> w </a:t>
+            </a:r>
+            <a:r>
+              <a:rPr lang="en-US" dirty="0" err="1">
+                <a:ea typeface="+mn-lt"/>
+                <a:cs typeface="+mn-lt"/>
+              </a:rPr>
+              <a:t>jobie</a:t>
+            </a:r>
+            <a:endParaRPr lang="en-US">
+              <a:ea typeface="+mn-lt"/>
+              <a:cs typeface="+mn-lt"/>
+            </a:endParaRPr>
+          </a:p>
+          <a:p>
+            <a:endParaRPr lang="en-US" dirty="0"/>
+          </a:p>
+        </p:txBody>
+      </p:sp>
+    </p:spTree>
+    <p:extLst>
+      <p:ext uri="{BB962C8B-B14F-4D97-AF65-F5344CB8AC3E}">
+        <p14:creationId xmlns:p14="http://schemas.microsoft.com/office/powerpoint/2010/main" val="2908270815"/>
+      </p:ext>
+    </p:extLst>
+  </p:cSld>
+  <p:clrMapOvr>
+    <a:masterClrMapping/>
+  </p:clrMapOvr>
+</p:sld>
+</file>
+
+<file path=ppt/slides/slide17.xml><?xml version="1.0" encoding="utf-8"?>
+<p:sld xmlns:a="http://schemas.openxmlformats.org/drawingml/2006/main" xmlns:r="http://schemas.openxmlformats.org/officeDocument/2006/relationships" xmlns:p="http://schemas.openxmlformats.org/presentationml/2006/main">
+  <p:cSld>
+    <p:spTree>
+      <p:nvGrpSpPr>
+        <p:cNvPr id="1" name=""/>
+        <p:cNvGrpSpPr/>
+        <p:nvPr/>
+      </p:nvGrpSpPr>
+      <p:grpSpPr>
+        <a:xfrm>
+          <a:off x="0" y="0"/>
+          <a:ext cx="0" cy="0"/>
+          <a:chOff x="0" y="0"/>
+          <a:chExt cx="0" cy="0"/>
+        </a:xfrm>
+      </p:grpSpPr>
+      <p:sp>
+        <p:nvSpPr>
+          <p:cNvPr id="2" name="Title 1">
+            <a:extLst>
+              <a:ext uri="{FF2B5EF4-FFF2-40B4-BE49-F238E27FC236}">
+                <a16:creationId xmlns:a16="http://schemas.microsoft.com/office/drawing/2014/main" id="{06F400E3-0BC7-0108-6EFF-92E06A4E0D5A}"/>
+              </a:ext>
+            </a:extLst>
+          </p:cNvPr>
+          <p:cNvSpPr>
+            <a:spLocks noGrp="1"/>
+          </p:cNvSpPr>
+          <p:nvPr>
+            <p:ph type="title"/>
+          </p:nvPr>
+        </p:nvSpPr>
+        <p:spPr/>
+        <p:txBody>
+          <a:bodyPr/>
+          <a:lstStyle/>
+          <a:p>
+            <a:r>
+              <a:rPr lang="en-US" dirty="0" err="1"/>
+              <a:t>Zadanie</a:t>
+            </a:r>
+          </a:p>
+        </p:txBody>
+      </p:sp>
+      <p:sp>
+        <p:nvSpPr>
+          <p:cNvPr id="3" name="Content Placeholder 2">
+            <a:extLst>
+              <a:ext uri="{FF2B5EF4-FFF2-40B4-BE49-F238E27FC236}">
+                <a16:creationId xmlns:a16="http://schemas.microsoft.com/office/drawing/2014/main" id="{50A54857-2039-7EF6-444F-807363CAE3EA}"/>
+              </a:ext>
+            </a:extLst>
+          </p:cNvPr>
+          <p:cNvSpPr>
+            <a:spLocks noGrp="1"/>
+          </p:cNvSpPr>
+          <p:nvPr>
+            <p:ph idx="1"/>
+          </p:nvPr>
+        </p:nvSpPr>
+        <p:spPr/>
+        <p:txBody>
+          <a:bodyPr vert="horz" lIns="91440" tIns="45720" rIns="91440" bIns="45720" rtlCol="0" anchor="t">
+            <a:normAutofit/>
+          </a:bodyPr>
+          <a:lstStyle/>
+          <a:p>
+            <a:r>
+              <a:rPr lang="en-US" dirty="0"/>
+              <a:t>Stwórz </a:t>
+            </a:r>
+            <a:r>
+              <a:rPr lang="en-US" dirty="0" err="1"/>
+              <a:t>testowy</a:t>
+            </a:r>
+            <a:r>
+              <a:rPr lang="en-US" dirty="0"/>
+              <a:t> job </a:t>
+            </a:r>
+            <a:r>
+              <a:rPr lang="en-US" dirty="0" err="1"/>
+              <a:t>złożony</a:t>
+            </a:r>
+            <a:r>
+              <a:rPr lang="en-US" dirty="0"/>
+              <a:t> z </a:t>
+            </a:r>
+            <a:r>
+              <a:rPr lang="en-US" dirty="0" err="1"/>
+              <a:t>dwóch</a:t>
+            </a:r>
+            <a:r>
+              <a:rPr lang="en-US" dirty="0"/>
+              <a:t> </a:t>
+            </a:r>
+            <a:r>
+              <a:rPr lang="en-US" dirty="0" err="1"/>
+              <a:t>tasków</a:t>
+            </a:r>
+            <a:r>
+              <a:rPr lang="en-US" dirty="0"/>
+              <a:t> </a:t>
+            </a:r>
+            <a:r>
+              <a:rPr lang="en-US" dirty="0" err="1"/>
+              <a:t>wykonywanych</a:t>
+            </a:r>
+            <a:r>
+              <a:rPr lang="en-US" dirty="0"/>
+              <a:t> po </a:t>
+            </a:r>
+            <a:r>
+              <a:rPr lang="en-US" dirty="0" err="1"/>
+              <a:t>kolei</a:t>
+            </a:r>
+            <a:r>
+              <a:rPr lang="en-US" dirty="0"/>
+              <a:t>. </a:t>
+            </a:r>
+            <a:r>
+              <a:rPr lang="en-US" dirty="0" err="1"/>
+              <a:t>Pierwszy</a:t>
+            </a:r>
+            <a:r>
+              <a:rPr lang="en-US" dirty="0"/>
+              <a:t> task ma </a:t>
+            </a:r>
+            <a:r>
+              <a:rPr lang="en-US" dirty="0" err="1"/>
+              <a:t>wypisywać</a:t>
+            </a:r>
+            <a:r>
+              <a:rPr lang="en-US" dirty="0"/>
+              <a:t> timestamp </a:t>
+            </a:r>
+            <a:r>
+              <a:rPr lang="en-US" dirty="0" err="1"/>
+              <a:t>uruchomienia</a:t>
+            </a:r>
+            <a:r>
+              <a:rPr lang="en-US" dirty="0"/>
+              <a:t> </a:t>
+            </a:r>
+            <a:r>
+              <a:rPr lang="en-US" dirty="0" err="1"/>
+              <a:t>joba</a:t>
+            </a:r>
+            <a:r>
+              <a:rPr lang="en-US" dirty="0"/>
+              <a:t> I </a:t>
+            </a:r>
+            <a:r>
+              <a:rPr lang="en-US" dirty="0" err="1"/>
+              <a:t>ścieżkę</a:t>
+            </a:r>
+            <a:r>
+              <a:rPr lang="en-US" dirty="0"/>
+              <a:t> do </a:t>
+            </a:r>
+            <a:r>
+              <a:rPr lang="en-US" dirty="0" err="1"/>
+              <a:t>notebooka</a:t>
+            </a:r>
+            <a:r>
+              <a:rPr lang="en-US" dirty="0"/>
+              <a:t>, </a:t>
+            </a:r>
+            <a:r>
+              <a:rPr lang="en-US" dirty="0" err="1"/>
+              <a:t>który</a:t>
+            </a:r>
+            <a:r>
+              <a:rPr lang="en-US" dirty="0"/>
+              <a:t> </a:t>
+            </a:r>
+            <a:r>
+              <a:rPr lang="en-US" dirty="0" err="1"/>
+              <a:t>aktualnie</a:t>
+            </a:r>
+            <a:r>
+              <a:rPr lang="en-US" dirty="0"/>
+              <a:t> jest </a:t>
+            </a:r>
+            <a:r>
+              <a:rPr lang="en-US" dirty="0" err="1"/>
+              <a:t>uruchamiany</a:t>
+            </a:r>
+            <a:r>
+              <a:rPr lang="en-US" dirty="0"/>
+              <a:t>. Drugi task ma </a:t>
+            </a:r>
+            <a:r>
+              <a:rPr lang="en-US" dirty="0" err="1"/>
+              <a:t>poprostu</a:t>
+            </a:r>
+            <a:r>
+              <a:rPr lang="en-US" dirty="0"/>
+              <a:t> </a:t>
+            </a:r>
+            <a:r>
+              <a:rPr lang="en-US" dirty="0" err="1"/>
+              <a:t>wypisywać</a:t>
+            </a:r>
+            <a:r>
+              <a:rPr lang="en-US" dirty="0"/>
+              <a:t> "Good bye!". </a:t>
+            </a:r>
+            <a:r>
+              <a:rPr lang="en-US" dirty="0" err="1"/>
+              <a:t>Ustaw</a:t>
+            </a:r>
+            <a:r>
+              <a:rPr lang="en-US" dirty="0"/>
+              <a:t> </a:t>
+            </a:r>
+            <a:r>
+              <a:rPr lang="en-US" dirty="0" err="1"/>
+              <a:t>cykliczne</a:t>
+            </a:r>
+            <a:r>
+              <a:rPr lang="en-US" dirty="0"/>
+              <a:t> </a:t>
+            </a:r>
+            <a:r>
+              <a:rPr lang="en-US" dirty="0" err="1"/>
+              <a:t>wykonywanie</a:t>
+            </a:r>
+            <a:r>
+              <a:rPr lang="en-US" dirty="0"/>
+              <a:t> </a:t>
+            </a:r>
+            <a:r>
+              <a:rPr lang="en-US" dirty="0" err="1"/>
+              <a:t>joba</a:t>
+            </a:r>
+            <a:r>
+              <a:rPr lang="en-US" dirty="0"/>
+              <a:t> I </a:t>
+            </a:r>
+            <a:r>
+              <a:rPr lang="en-US" dirty="0" err="1"/>
+              <a:t>wysyłanie</a:t>
+            </a:r>
+            <a:r>
+              <a:rPr lang="en-US" dirty="0"/>
+              <a:t> </a:t>
+            </a:r>
+            <a:r>
+              <a:rPr lang="en-US" dirty="0" err="1"/>
+              <a:t>powiadomień</a:t>
+            </a:r>
+            <a:r>
+              <a:rPr lang="en-US" dirty="0"/>
+              <a:t> </a:t>
+            </a:r>
+            <a:r>
+              <a:rPr lang="en-US" dirty="0" err="1"/>
+              <a:t>na</a:t>
+            </a:r>
+            <a:r>
+              <a:rPr lang="en-US" dirty="0"/>
+              <a:t> </a:t>
+            </a:r>
+            <a:r>
+              <a:rPr lang="en-US" dirty="0" err="1"/>
+              <a:t>swój</a:t>
+            </a:r>
+            <a:r>
+              <a:rPr lang="en-US" dirty="0"/>
+              <a:t> </a:t>
+            </a:r>
+            <a:r>
+              <a:rPr lang="en-US" dirty="0" err="1"/>
+              <a:t>adres</a:t>
+            </a:r>
+            <a:r>
+              <a:rPr lang="en-US" dirty="0"/>
+              <a:t> </a:t>
+            </a:r>
+            <a:r>
+              <a:rPr lang="en-US" dirty="0" err="1"/>
+              <a:t>mailowy</a:t>
+            </a:r>
+            <a:r>
+              <a:rPr lang="en-US" dirty="0"/>
+              <a:t> w </a:t>
+            </a:r>
+            <a:r>
+              <a:rPr lang="en-US" dirty="0" err="1"/>
+              <a:t>przypadku</a:t>
+            </a:r>
+            <a:r>
+              <a:rPr lang="en-US" dirty="0"/>
+              <a:t> </a:t>
+            </a:r>
+            <a:r>
+              <a:rPr lang="en-US" dirty="0" err="1"/>
+              <a:t>powodzenia</a:t>
+            </a:r>
+            <a:r>
+              <a:rPr lang="en-US" dirty="0"/>
+              <a:t> </a:t>
+            </a:r>
+            <a:r>
+              <a:rPr lang="en-US" dirty="0" err="1"/>
+              <a:t>lub</a:t>
+            </a:r>
+            <a:r>
+              <a:rPr lang="en-US" dirty="0"/>
+              <a:t> </a:t>
+            </a:r>
+            <a:r>
+              <a:rPr lang="en-US" dirty="0" err="1"/>
+              <a:t>niepowodzenia</a:t>
+            </a:r>
+            <a:r>
+              <a:rPr lang="en-US" dirty="0"/>
+              <a:t> </a:t>
+            </a:r>
+            <a:r>
+              <a:rPr lang="en-US" dirty="0" err="1"/>
+              <a:t>wykonania</a:t>
+            </a:r>
+            <a:r>
+              <a:rPr lang="en-US" dirty="0"/>
+              <a:t>.</a:t>
+            </a:r>
+          </a:p>
+          <a:p>
+            <a:endParaRPr lang="en-US" dirty="0"/>
+          </a:p>
+        </p:txBody>
+      </p:sp>
+    </p:spTree>
+    <p:extLst>
+      <p:ext uri="{BB962C8B-B14F-4D97-AF65-F5344CB8AC3E}">
+        <p14:creationId xmlns:p14="http://schemas.microsoft.com/office/powerpoint/2010/main" val="3888981698"/>
+      </p:ext>
+    </p:extLst>
+  </p:cSld>
+  <p:clrMapOvr>
+    <a:masterClrMapping/>
+  </p:clrMapOvr>
+</p:sld>
+</file>
+
+<file path=ppt/slides/slide18.xml><?xml version="1.0" encoding="utf-8"?>
+<p:sld xmlns:a="http://schemas.openxmlformats.org/drawingml/2006/main" xmlns:r="http://schemas.openxmlformats.org/officeDocument/2006/relationships" xmlns:p="http://schemas.openxmlformats.org/presentationml/2006/main">
+  <p:cSld>
+    <p:spTree>
+      <p:nvGrpSpPr>
+        <p:cNvPr id="1" name=""/>
+        <p:cNvGrpSpPr/>
+        <p:nvPr/>
+      </p:nvGrpSpPr>
+      <p:grpSpPr>
+        <a:xfrm>
+          <a:off x="0" y="0"/>
+          <a:ext cx="0" cy="0"/>
+          <a:chOff x="0" y="0"/>
+          <a:chExt cx="0" cy="0"/>
+        </a:xfrm>
+      </p:grpSpPr>
+      <p:sp>
+        <p:nvSpPr>
+          <p:cNvPr id="2" name="Title 1">
+            <a:extLst>
+              <a:ext uri="{FF2B5EF4-FFF2-40B4-BE49-F238E27FC236}">
+                <a16:creationId xmlns:a16="http://schemas.microsoft.com/office/drawing/2014/main" id="{D785A3AC-6A5A-696E-6CBC-CC1627F507D5}"/>
+              </a:ext>
+            </a:extLst>
+          </p:cNvPr>
+          <p:cNvSpPr>
+            <a:spLocks noGrp="1"/>
+          </p:cNvSpPr>
+          <p:nvPr>
+            <p:ph type="title"/>
+          </p:nvPr>
+        </p:nvSpPr>
+        <p:spPr/>
+        <p:txBody>
+          <a:bodyPr/>
+          <a:lstStyle/>
+          <a:p>
+            <a:r>
+              <a:rPr lang="en-US" err="1">
+                <a:ea typeface="+mj-lt"/>
+                <a:cs typeface="+mj-lt"/>
+              </a:rPr>
+              <a:t>Przetwarzanie</a:t>
+            </a:r>
+            <a:r>
+              <a:rPr lang="en-US">
+                <a:ea typeface="+mj-lt"/>
+                <a:cs typeface="+mj-lt"/>
+              </a:rPr>
+              <a:t> Batch vs streaming</a:t>
+            </a:r>
+            <a:endParaRPr lang="en-US"/>
+          </a:p>
+        </p:txBody>
+      </p:sp>
+      <p:sp>
+        <p:nvSpPr>
+          <p:cNvPr id="3" name="Content Placeholder 2">
+            <a:extLst>
+              <a:ext uri="{FF2B5EF4-FFF2-40B4-BE49-F238E27FC236}">
+                <a16:creationId xmlns:a16="http://schemas.microsoft.com/office/drawing/2014/main" id="{BA421A06-D892-4EE4-7984-AE1D63212A2E}"/>
+              </a:ext>
+            </a:extLst>
+          </p:cNvPr>
+          <p:cNvSpPr>
+            <a:spLocks noGrp="1"/>
+          </p:cNvSpPr>
+          <p:nvPr>
+            <p:ph idx="1"/>
+          </p:nvPr>
+        </p:nvSpPr>
+        <p:spPr/>
+        <p:txBody>
+          <a:bodyPr vert="horz" lIns="91440" tIns="45720" rIns="91440" bIns="45720" rtlCol="0" anchor="t">
+            <a:normAutofit/>
+          </a:bodyPr>
+          <a:lstStyle/>
+          <a:p>
+            <a:r>
+              <a:rPr lang="en-US" dirty="0">
+                <a:ea typeface="+mn-lt"/>
+                <a:cs typeface="+mn-lt"/>
+              </a:rPr>
+              <a:t>batch → </a:t>
+            </a:r>
+            <a:r>
+              <a:rPr lang="en-US" dirty="0" err="1">
+                <a:ea typeface="+mn-lt"/>
+                <a:cs typeface="+mn-lt"/>
+              </a:rPr>
+              <a:t>przetwarzanie</a:t>
+            </a:r>
+            <a:r>
+              <a:rPr lang="en-US" dirty="0">
+                <a:ea typeface="+mn-lt"/>
+                <a:cs typeface="+mn-lt"/>
+              </a:rPr>
+              <a:t> </a:t>
+            </a:r>
+            <a:r>
+              <a:rPr lang="en-US" dirty="0" err="1">
+                <a:ea typeface="+mn-lt"/>
+                <a:cs typeface="+mn-lt"/>
+              </a:rPr>
+              <a:t>okresowe</a:t>
+            </a:r>
+            <a:endParaRPr lang="en-US" dirty="0" err="1"/>
+          </a:p>
+          <a:p>
+            <a:r>
+              <a:rPr lang="en-US" dirty="0">
+                <a:ea typeface="+mn-lt"/>
+                <a:cs typeface="+mn-lt"/>
+              </a:rPr>
+              <a:t>streaming → near real-time. W </a:t>
+            </a:r>
+            <a:r>
+              <a:rPr lang="en-US" dirty="0" err="1">
+                <a:ea typeface="+mn-lt"/>
+                <a:cs typeface="+mn-lt"/>
+              </a:rPr>
+              <a:t>tym</a:t>
+            </a:r>
+            <a:r>
+              <a:rPr lang="en-US" dirty="0">
+                <a:ea typeface="+mn-lt"/>
+                <a:cs typeface="+mn-lt"/>
+              </a:rPr>
+              <a:t> </a:t>
+            </a:r>
+            <a:r>
+              <a:rPr lang="en-US" dirty="0" err="1">
+                <a:ea typeface="+mn-lt"/>
+                <a:cs typeface="+mn-lt"/>
+              </a:rPr>
+              <a:t>celu</a:t>
+            </a:r>
+            <a:r>
+              <a:rPr lang="en-US" dirty="0">
+                <a:ea typeface="+mn-lt"/>
+                <a:cs typeface="+mn-lt"/>
+              </a:rPr>
+              <a:t> </a:t>
+            </a:r>
+            <a:r>
+              <a:rPr lang="en-US" dirty="0" err="1">
+                <a:ea typeface="+mn-lt"/>
+                <a:cs typeface="+mn-lt"/>
+              </a:rPr>
+              <a:t>przydają</a:t>
+            </a:r>
+            <a:r>
+              <a:rPr lang="en-US" dirty="0">
+                <a:ea typeface="+mn-lt"/>
+                <a:cs typeface="+mn-lt"/>
+              </a:rPr>
+              <a:t> </a:t>
+            </a:r>
+            <a:r>
+              <a:rPr lang="en-US" dirty="0" err="1">
+                <a:ea typeface="+mn-lt"/>
+                <a:cs typeface="+mn-lt"/>
+              </a:rPr>
+              <a:t>się</a:t>
+            </a:r>
+            <a:r>
+              <a:rPr lang="en-US" dirty="0">
+                <a:ea typeface="+mn-lt"/>
+                <a:cs typeface="+mn-lt"/>
+              </a:rPr>
+              <a:t> </a:t>
+            </a:r>
+            <a:r>
+              <a:rPr lang="en-US" dirty="0" err="1">
+                <a:ea typeface="+mn-lt"/>
+                <a:cs typeface="+mn-lt"/>
+                <a:hlinkClick r:id="rId2"/>
+              </a:rPr>
+              <a:t>tabele</a:t>
+            </a:r>
+            <a:r>
+              <a:rPr lang="en-US" dirty="0">
+                <a:ea typeface="+mn-lt"/>
+                <a:cs typeface="+mn-lt"/>
+                <a:hlinkClick r:id="rId2"/>
+              </a:rPr>
+              <a:t> </a:t>
+            </a:r>
+            <a:r>
+              <a:rPr lang="en-US" dirty="0" err="1">
+                <a:ea typeface="+mn-lt"/>
+                <a:cs typeface="+mn-lt"/>
+                <a:hlinkClick r:id="rId2"/>
+              </a:rPr>
+              <a:t>typu</a:t>
+            </a:r>
+            <a:r>
+              <a:rPr lang="en-US" dirty="0">
+                <a:ea typeface="+mn-lt"/>
+                <a:cs typeface="+mn-lt"/>
+                <a:hlinkClick r:id="rId2"/>
+              </a:rPr>
+              <a:t> STREAMING</a:t>
+            </a:r>
+            <a:r>
+              <a:rPr lang="en-US" dirty="0">
+                <a:ea typeface="+mn-lt"/>
+                <a:cs typeface="+mn-lt"/>
+              </a:rPr>
+              <a:t>.</a:t>
+            </a:r>
+            <a:endParaRPr lang="en-US" dirty="0"/>
+          </a:p>
+        </p:txBody>
+      </p:sp>
+    </p:spTree>
+    <p:extLst>
+      <p:ext uri="{BB962C8B-B14F-4D97-AF65-F5344CB8AC3E}">
+        <p14:creationId xmlns:p14="http://schemas.microsoft.com/office/powerpoint/2010/main" val="2311504730"/>
+      </p:ext>
+    </p:extLst>
+  </p:cSld>
+  <p:clrMapOvr>
+    <a:masterClrMapping/>
+  </p:clrMapOvr>
+</p:sld>
+</file>
+
+<file path=ppt/slides/slide19.xml><?xml version="1.0" encoding="utf-8"?>
+<p:sld xmlns:a="http://schemas.openxmlformats.org/drawingml/2006/main" xmlns:r="http://schemas.openxmlformats.org/officeDocument/2006/relationships" xmlns:p="http://schemas.openxmlformats.org/presentationml/2006/main">
+  <p:cSld>
+    <p:spTree>
+      <p:nvGrpSpPr>
+        <p:cNvPr id="1" name=""/>
+        <p:cNvGrpSpPr/>
+        <p:nvPr/>
+      </p:nvGrpSpPr>
+      <p:grpSpPr>
+        <a:xfrm>
+          <a:off x="0" y="0"/>
+          <a:ext cx="0" cy="0"/>
+          <a:chOff x="0" y="0"/>
+          <a:chExt cx="0" cy="0"/>
+        </a:xfrm>
+      </p:grpSpPr>
+      <p:sp>
+        <p:nvSpPr>
+          <p:cNvPr id="2" name="Title 1">
+            <a:extLst>
+              <a:ext uri="{FF2B5EF4-FFF2-40B4-BE49-F238E27FC236}">
+                <a16:creationId xmlns:a16="http://schemas.microsoft.com/office/drawing/2014/main" id="{31747409-2454-BEBD-10B9-BE4AB38371DE}"/>
+              </a:ext>
+            </a:extLst>
+          </p:cNvPr>
+          <p:cNvSpPr>
+            <a:spLocks noGrp="1"/>
+          </p:cNvSpPr>
+          <p:nvPr>
+            <p:ph type="title"/>
+          </p:nvPr>
+        </p:nvSpPr>
+        <p:spPr/>
+        <p:txBody>
+          <a:bodyPr/>
+          <a:lstStyle/>
+          <a:p>
+            <a:r>
+              <a:rPr lang="en-US" dirty="0">
+                <a:hlinkClick r:id="rId2"/>
+              </a:rPr>
+              <a:t>Architektura medalionowa</a:t>
+            </a:r>
+          </a:p>
+        </p:txBody>
+      </p:sp>
+      <p:sp>
+        <p:nvSpPr>
+          <p:cNvPr id="3" name="Content Placeholder 2">
+            <a:extLst>
+              <a:ext uri="{FF2B5EF4-FFF2-40B4-BE49-F238E27FC236}">
+                <a16:creationId xmlns:a16="http://schemas.microsoft.com/office/drawing/2014/main" id="{8739677A-E868-8CD6-6DD3-0FCCF37325C4}"/>
+              </a:ext>
+            </a:extLst>
+          </p:cNvPr>
+          <p:cNvSpPr>
+            <a:spLocks noGrp="1"/>
+          </p:cNvSpPr>
+          <p:nvPr>
+            <p:ph idx="1"/>
+          </p:nvPr>
+        </p:nvSpPr>
+        <p:spPr/>
+        <p:txBody>
+          <a:bodyPr vert="horz" lIns="91440" tIns="45720" rIns="91440" bIns="45720" rtlCol="0" anchor="t">
+            <a:normAutofit/>
+          </a:bodyPr>
+          <a:lstStyle/>
+          <a:p>
+            <a:pPr marL="0" indent="0">
+              <a:buNone/>
+            </a:pPr>
+            <a:endParaRPr lang="en-US" dirty="0">
+              <a:ea typeface="+mn-lt"/>
+              <a:cs typeface="+mn-lt"/>
+            </a:endParaRPr>
+          </a:p>
+          <a:p>
+            <a:r>
+              <a:rPr lang="en-US" dirty="0">
+                <a:ea typeface="+mn-lt"/>
+                <a:cs typeface="+mn-lt"/>
+              </a:rPr>
+              <a:t>Bronze → </a:t>
+            </a:r>
+            <a:r>
+              <a:rPr lang="en-US" dirty="0" err="1">
+                <a:ea typeface="+mn-lt"/>
+                <a:cs typeface="+mn-lt"/>
+              </a:rPr>
+              <a:t>surowe</a:t>
+            </a:r>
+            <a:r>
+              <a:rPr lang="en-US" dirty="0">
+                <a:ea typeface="+mn-lt"/>
+                <a:cs typeface="+mn-lt"/>
+              </a:rPr>
+              <a:t> </a:t>
+            </a:r>
+            <a:r>
+              <a:rPr lang="en-US" dirty="0" err="1">
+                <a:ea typeface="+mn-lt"/>
+                <a:cs typeface="+mn-lt"/>
+              </a:rPr>
+              <a:t>dane</a:t>
+            </a:r>
+            <a:endParaRPr lang="en-US" dirty="0"/>
+          </a:p>
+          <a:p>
+            <a:endParaRPr lang="en-US"/>
+          </a:p>
+          <a:p>
+            <a:r>
+              <a:rPr lang="en-US" dirty="0">
+                <a:ea typeface="+mn-lt"/>
+                <a:cs typeface="+mn-lt"/>
+              </a:rPr>
+              <a:t>Silver → </a:t>
+            </a:r>
+            <a:r>
+              <a:rPr lang="en-US" dirty="0" err="1">
+                <a:ea typeface="+mn-lt"/>
+                <a:cs typeface="+mn-lt"/>
+              </a:rPr>
+              <a:t>oczyszczone</a:t>
+            </a:r>
+            <a:endParaRPr lang="en-US" dirty="0" err="1"/>
+          </a:p>
+          <a:p>
+            <a:endParaRPr lang="en-US"/>
+          </a:p>
+          <a:p>
+            <a:r>
+              <a:rPr lang="en-US" dirty="0">
+                <a:ea typeface="+mn-lt"/>
+                <a:cs typeface="+mn-lt"/>
+              </a:rPr>
+              <a:t>Gold → </a:t>
+            </a:r>
+            <a:r>
+              <a:rPr lang="en-US" dirty="0" err="1">
+                <a:ea typeface="+mn-lt"/>
+                <a:cs typeface="+mn-lt"/>
+              </a:rPr>
+              <a:t>agregaty</a:t>
+            </a:r>
+            <a:endParaRPr lang="en-US" dirty="0" err="1"/>
+          </a:p>
+        </p:txBody>
+      </p:sp>
+    </p:spTree>
+    <p:extLst>
+      <p:ext uri="{BB962C8B-B14F-4D97-AF65-F5344CB8AC3E}">
+        <p14:creationId xmlns:p14="http://schemas.microsoft.com/office/powerpoint/2010/main" val="1176261314"/>
       </p:ext>
     </p:extLst>
   </p:cSld>
@@ -4032,6 +5489,565 @@
     <p:extLst>
       <p:ext uri="{BB962C8B-B14F-4D97-AF65-F5344CB8AC3E}">
         <p14:creationId xmlns:p14="http://schemas.microsoft.com/office/powerpoint/2010/main" val="3924383895"/>
+      </p:ext>
+    </p:extLst>
+  </p:cSld>
+  <p:clrMapOvr>
+    <a:masterClrMapping/>
+  </p:clrMapOvr>
+</p:sld>
+</file>
+
+<file path=ppt/slides/slide20.xml><?xml version="1.0" encoding="utf-8"?>
+<p:sld xmlns:a="http://schemas.openxmlformats.org/drawingml/2006/main" xmlns:r="http://schemas.openxmlformats.org/officeDocument/2006/relationships" xmlns:p="http://schemas.openxmlformats.org/presentationml/2006/main">
+  <p:cSld>
+    <p:spTree>
+      <p:nvGrpSpPr>
+        <p:cNvPr id="1" name=""/>
+        <p:cNvGrpSpPr/>
+        <p:nvPr/>
+      </p:nvGrpSpPr>
+      <p:grpSpPr>
+        <a:xfrm>
+          <a:off x="0" y="0"/>
+          <a:ext cx="0" cy="0"/>
+          <a:chOff x="0" y="0"/>
+          <a:chExt cx="0" cy="0"/>
+        </a:xfrm>
+      </p:grpSpPr>
+      <p:sp>
+        <p:nvSpPr>
+          <p:cNvPr id="2" name="Title 1">
+            <a:extLst>
+              <a:ext uri="{FF2B5EF4-FFF2-40B4-BE49-F238E27FC236}">
+                <a16:creationId xmlns:a16="http://schemas.microsoft.com/office/drawing/2014/main" id="{65CCC8CB-F904-A354-07E1-00DFFA948535}"/>
+              </a:ext>
+            </a:extLst>
+          </p:cNvPr>
+          <p:cNvSpPr>
+            <a:spLocks noGrp="1"/>
+          </p:cNvSpPr>
+          <p:nvPr>
+            <p:ph type="title"/>
+          </p:nvPr>
+        </p:nvSpPr>
+        <p:spPr/>
+        <p:txBody>
+          <a:bodyPr>
+            <a:normAutofit/>
+          </a:bodyPr>
+          <a:lstStyle/>
+          <a:p>
+            <a:pPr marL="228600" indent="-228600">
+              <a:spcBef>
+                <a:spcPts val="1000"/>
+              </a:spcBef>
+            </a:pPr>
+            <a:r>
+              <a:rPr lang="en-US" dirty="0" err="1">
+                <a:latin typeface="Aptos"/>
+                <a:hlinkClick r:id="rId2"/>
+              </a:rPr>
+              <a:t>Pipeline'y</a:t>
+            </a:r>
+            <a:endParaRPr lang="en-US" err="1"/>
+          </a:p>
+        </p:txBody>
+      </p:sp>
+      <p:sp>
+        <p:nvSpPr>
+          <p:cNvPr id="3" name="Content Placeholder 2">
+            <a:extLst>
+              <a:ext uri="{FF2B5EF4-FFF2-40B4-BE49-F238E27FC236}">
+                <a16:creationId xmlns:a16="http://schemas.microsoft.com/office/drawing/2014/main" id="{EDCB911F-79B7-2573-4E8F-9CD41CDADCB3}"/>
+              </a:ext>
+            </a:extLst>
+          </p:cNvPr>
+          <p:cNvSpPr>
+            <a:spLocks noGrp="1"/>
+          </p:cNvSpPr>
+          <p:nvPr>
+            <p:ph idx="1"/>
+          </p:nvPr>
+        </p:nvSpPr>
+        <p:spPr/>
+        <p:txBody>
+          <a:bodyPr vert="horz" lIns="91440" tIns="45720" rIns="91440" bIns="45720" rtlCol="0" anchor="t">
+            <a:normAutofit/>
+          </a:bodyPr>
+          <a:lstStyle/>
+          <a:p>
+            <a:r>
+              <a:rPr lang="en-US" dirty="0" err="1"/>
+              <a:t>Zadanie</a:t>
+            </a:r>
+            <a:r>
+              <a:rPr lang="en-US" dirty="0"/>
+              <a:t>: </a:t>
+            </a:r>
+            <a:r>
+              <a:rPr lang="en-US" dirty="0" err="1"/>
+              <a:t>stwórz</a:t>
+            </a:r>
+            <a:r>
+              <a:rPr lang="en-US" dirty="0"/>
+              <a:t> pipeline, </a:t>
+            </a:r>
+            <a:r>
+              <a:rPr lang="en-US" dirty="0" err="1"/>
+              <a:t>który</a:t>
+            </a:r>
+            <a:r>
+              <a:rPr lang="en-US" dirty="0"/>
+              <a:t> </a:t>
+            </a:r>
+            <a:r>
+              <a:rPr lang="en-US" dirty="0" err="1"/>
+              <a:t>na</a:t>
+            </a:r>
+            <a:r>
+              <a:rPr lang="en-US" dirty="0"/>
+              <a:t> </a:t>
+            </a:r>
+            <a:r>
+              <a:rPr lang="en-US" dirty="0" err="1"/>
+              <a:t>podstawie</a:t>
+            </a:r>
+            <a:r>
+              <a:rPr lang="en-US" dirty="0"/>
+              <a:t> </a:t>
+            </a:r>
+            <a:r>
+              <a:rPr lang="en-US" dirty="0" err="1"/>
+              <a:t>danych</a:t>
+            </a:r>
+            <a:r>
+              <a:rPr lang="en-US" dirty="0"/>
+              <a:t> </a:t>
+            </a:r>
+            <a:r>
+              <a:rPr lang="en-US" dirty="0" err="1"/>
+              <a:t>zawartych</a:t>
+            </a:r>
+            <a:r>
+              <a:rPr lang="en-US" dirty="0"/>
+              <a:t> w </a:t>
+            </a:r>
+            <a:r>
+              <a:rPr lang="en-US" dirty="0" err="1"/>
+              <a:t>samples.bakehouse</a:t>
+            </a:r>
+            <a:r>
+              <a:rPr lang="en-US" dirty="0"/>
+              <a:t> </a:t>
+            </a:r>
+            <a:r>
+              <a:rPr lang="en-US" dirty="0" err="1"/>
+              <a:t>przygotuje</a:t>
+            </a:r>
+            <a:r>
+              <a:rPr lang="en-US" dirty="0"/>
+              <a:t> </a:t>
+            </a:r>
+            <a:r>
+              <a:rPr lang="en-US" dirty="0" err="1"/>
+              <a:t>dane</a:t>
+            </a:r>
+            <a:r>
+              <a:rPr lang="en-US" dirty="0"/>
+              <a:t> w </a:t>
+            </a:r>
+            <a:r>
+              <a:rPr lang="en-US" dirty="0" err="1"/>
+              <a:t>warstwach</a:t>
+            </a:r>
+            <a:r>
+              <a:rPr lang="en-US" dirty="0"/>
+              <a:t> bronze, silver, gold. </a:t>
+            </a:r>
+            <a:r>
+              <a:rPr lang="en-US" dirty="0" err="1"/>
+              <a:t>Wykorzystaj</a:t>
+            </a:r>
+            <a:r>
+              <a:rPr lang="en-US" dirty="0"/>
+              <a:t> </a:t>
+            </a:r>
+            <a:r>
+              <a:rPr lang="en-US" dirty="0" err="1"/>
+              <a:t>agenta</a:t>
+            </a:r>
+            <a:r>
+              <a:rPr lang="en-US" dirty="0"/>
+              <a:t> AI. </a:t>
+            </a:r>
+            <a:r>
+              <a:rPr lang="en-US" dirty="0" err="1"/>
+              <a:t>Sprawdź</a:t>
+            </a:r>
+            <a:r>
+              <a:rPr lang="en-US" dirty="0"/>
+              <a:t> co </a:t>
+            </a:r>
+            <a:r>
+              <a:rPr lang="en-US" dirty="0" err="1"/>
+              <a:t>zostało</a:t>
+            </a:r>
+            <a:r>
+              <a:rPr lang="en-US" dirty="0"/>
+              <a:t> </a:t>
+            </a:r>
+            <a:r>
+              <a:rPr lang="en-US" dirty="0" err="1"/>
+              <a:t>utworzone</a:t>
+            </a:r>
+            <a:r>
+              <a:rPr lang="en-US" dirty="0"/>
+              <a:t>. Odpowiedz </a:t>
+            </a:r>
+            <a:r>
+              <a:rPr lang="en-US" dirty="0" err="1"/>
+              <a:t>na</a:t>
+            </a:r>
+            <a:r>
+              <a:rPr lang="en-US" dirty="0"/>
+              <a:t> </a:t>
+            </a:r>
+            <a:r>
+              <a:rPr lang="en-US" dirty="0" err="1"/>
+              <a:t>pytania</a:t>
+            </a:r>
+            <a:r>
+              <a:rPr lang="en-US" dirty="0"/>
+              <a:t>:</a:t>
+            </a:r>
+          </a:p>
+          <a:p>
+            <a:pPr lvl="1">
+              <a:buFont typeface="Courier New" panose="020B0604020202020204" pitchFamily="34" charset="0"/>
+              <a:buChar char="o"/>
+            </a:pPr>
+            <a:r>
+              <a:rPr lang="en-US" dirty="0"/>
+              <a:t>Jakie </a:t>
+            </a:r>
+            <a:r>
+              <a:rPr lang="en-US" dirty="0" err="1"/>
+              <a:t>elementy</a:t>
+            </a:r>
+            <a:r>
+              <a:rPr lang="en-US" dirty="0"/>
+              <a:t> </a:t>
+            </a:r>
+            <a:r>
+              <a:rPr lang="en-US" dirty="0" err="1"/>
+              <a:t>standaryzacji</a:t>
+            </a:r>
+            <a:r>
+              <a:rPr lang="en-US" dirty="0"/>
+              <a:t> </a:t>
+            </a:r>
+            <a:r>
+              <a:rPr lang="en-US" dirty="0" err="1"/>
+              <a:t>na</a:t>
+            </a:r>
+            <a:r>
+              <a:rPr lang="en-US" dirty="0"/>
+              <a:t> </a:t>
+            </a:r>
+            <a:r>
+              <a:rPr lang="en-US" dirty="0" err="1"/>
+              <a:t>warstwie</a:t>
+            </a:r>
+            <a:r>
+              <a:rPr lang="en-US" dirty="0"/>
+              <a:t> silver </a:t>
+            </a:r>
+            <a:r>
+              <a:rPr lang="en-US" dirty="0" err="1"/>
+              <a:t>zostały</a:t>
+            </a:r>
+            <a:r>
+              <a:rPr lang="en-US" dirty="0"/>
+              <a:t> </a:t>
+            </a:r>
+            <a:r>
+              <a:rPr lang="en-US" dirty="0" err="1"/>
+              <a:t>zaproponowane</a:t>
+            </a:r>
+            <a:r>
+              <a:rPr lang="en-US" dirty="0"/>
+              <a:t> </a:t>
+            </a:r>
+            <a:r>
+              <a:rPr lang="en-US" dirty="0" err="1"/>
+              <a:t>przez</a:t>
+            </a:r>
+            <a:r>
+              <a:rPr lang="en-US" dirty="0"/>
+              <a:t> Genie?</a:t>
+            </a:r>
+          </a:p>
+          <a:p>
+            <a:pPr lvl="1">
+              <a:buFont typeface="Courier New" panose="020B0604020202020204" pitchFamily="34" charset="0"/>
+              <a:buChar char="o"/>
+            </a:pPr>
+            <a:r>
+              <a:rPr lang="en-US" dirty="0"/>
+              <a:t>Jakie </a:t>
+            </a:r>
+            <a:r>
+              <a:rPr lang="en-US" dirty="0" err="1"/>
+              <a:t>dane</a:t>
+            </a:r>
+            <a:r>
+              <a:rPr lang="en-US" dirty="0"/>
+              <a:t> </a:t>
+            </a:r>
+            <a:r>
+              <a:rPr lang="en-US" dirty="0" err="1"/>
+              <a:t>na</a:t>
+            </a:r>
+            <a:r>
+              <a:rPr lang="en-US" dirty="0"/>
+              <a:t> </a:t>
+            </a:r>
+            <a:r>
+              <a:rPr lang="en-US" dirty="0" err="1"/>
+              <a:t>warstwie</a:t>
+            </a:r>
+            <a:r>
+              <a:rPr lang="en-US" dirty="0"/>
+              <a:t> silver agent AI </a:t>
+            </a:r>
+            <a:r>
+              <a:rPr lang="en-US" dirty="0" err="1"/>
+              <a:t>uznał</a:t>
+            </a:r>
+            <a:r>
+              <a:rPr lang="en-US" dirty="0"/>
+              <a:t> za </a:t>
+            </a:r>
+            <a:r>
+              <a:rPr lang="en-US" dirty="0" err="1"/>
+              <a:t>warte</a:t>
+            </a:r>
+            <a:r>
+              <a:rPr lang="en-US" dirty="0"/>
+              <a:t> </a:t>
+            </a:r>
+            <a:r>
+              <a:rPr lang="en-US" dirty="0" err="1"/>
+              <a:t>wzbogacenia</a:t>
+            </a:r>
+            <a:r>
+              <a:rPr lang="en-US" dirty="0"/>
+              <a:t>?</a:t>
+            </a:r>
+          </a:p>
+          <a:p>
+            <a:pPr lvl="1">
+              <a:buFont typeface="Courier New" panose="020B0604020202020204" pitchFamily="34" charset="0"/>
+              <a:buChar char="o"/>
+            </a:pPr>
+            <a:r>
+              <a:rPr lang="en-US" dirty="0"/>
+              <a:t>Jakie </a:t>
+            </a:r>
+            <a:r>
+              <a:rPr lang="en-US" dirty="0" err="1"/>
+              <a:t>agregacje</a:t>
+            </a:r>
+            <a:r>
+              <a:rPr lang="en-US" dirty="0"/>
+              <a:t> </a:t>
+            </a:r>
+            <a:r>
+              <a:rPr lang="en-US" dirty="0" err="1"/>
+              <a:t>na</a:t>
+            </a:r>
+            <a:r>
+              <a:rPr lang="en-US" dirty="0"/>
+              <a:t> </a:t>
+            </a:r>
+            <a:r>
+              <a:rPr lang="en-US" dirty="0" err="1"/>
+              <a:t>warstwie</a:t>
+            </a:r>
+            <a:r>
+              <a:rPr lang="en-US" dirty="0"/>
+              <a:t> gold </a:t>
+            </a:r>
+            <a:r>
+              <a:rPr lang="en-US" dirty="0" err="1"/>
+              <a:t>sztuczna</a:t>
+            </a:r>
+            <a:r>
+              <a:rPr lang="en-US" dirty="0"/>
+              <a:t> </a:t>
+            </a:r>
+            <a:r>
+              <a:rPr lang="en-US" dirty="0" err="1"/>
+              <a:t>integligencja</a:t>
+            </a:r>
+            <a:r>
+              <a:rPr lang="en-US" dirty="0"/>
+              <a:t> </a:t>
+            </a:r>
+            <a:r>
+              <a:rPr lang="en-US" dirty="0" err="1"/>
+              <a:t>uznała</a:t>
+            </a:r>
+            <a:r>
+              <a:rPr lang="en-US" dirty="0"/>
+              <a:t> za </a:t>
+            </a:r>
+            <a:r>
+              <a:rPr lang="en-US" dirty="0" err="1"/>
+              <a:t>warte</a:t>
+            </a:r>
+            <a:r>
+              <a:rPr lang="en-US" dirty="0"/>
+              <a:t> </a:t>
+            </a:r>
+            <a:r>
+              <a:rPr lang="en-US" dirty="0" err="1"/>
+              <a:t>przeliczenia</a:t>
+            </a:r>
+            <a:r>
+              <a:rPr lang="en-US" dirty="0"/>
+              <a:t>?</a:t>
+            </a:r>
+          </a:p>
+        </p:txBody>
+      </p:sp>
+    </p:spTree>
+    <p:extLst>
+      <p:ext uri="{BB962C8B-B14F-4D97-AF65-F5344CB8AC3E}">
+        <p14:creationId xmlns:p14="http://schemas.microsoft.com/office/powerpoint/2010/main" val="2857454662"/>
+      </p:ext>
+    </p:extLst>
+  </p:cSld>
+  <p:clrMapOvr>
+    <a:masterClrMapping/>
+  </p:clrMapOvr>
+</p:sld>
+</file>
+
+<file path=ppt/slides/slide21.xml><?xml version="1.0" encoding="utf-8"?>
+<p:sld xmlns:a="http://schemas.openxmlformats.org/drawingml/2006/main" xmlns:r="http://schemas.openxmlformats.org/officeDocument/2006/relationships" xmlns:p="http://schemas.openxmlformats.org/presentationml/2006/main">
+  <p:cSld>
+    <p:spTree>
+      <p:nvGrpSpPr>
+        <p:cNvPr id="1" name=""/>
+        <p:cNvGrpSpPr/>
+        <p:nvPr/>
+      </p:nvGrpSpPr>
+      <p:grpSpPr>
+        <a:xfrm>
+          <a:off x="0" y="0"/>
+          <a:ext cx="0" cy="0"/>
+          <a:chOff x="0" y="0"/>
+          <a:chExt cx="0" cy="0"/>
+        </a:xfrm>
+      </p:grpSpPr>
+      <p:sp>
+        <p:nvSpPr>
+          <p:cNvPr id="2" name="Title 1">
+            <a:extLst>
+              <a:ext uri="{FF2B5EF4-FFF2-40B4-BE49-F238E27FC236}">
+                <a16:creationId xmlns:a16="http://schemas.microsoft.com/office/drawing/2014/main" id="{C1AC7691-C977-D96F-FE56-2787016AD138}"/>
+              </a:ext>
+            </a:extLst>
+          </p:cNvPr>
+          <p:cNvSpPr>
+            <a:spLocks noGrp="1"/>
+          </p:cNvSpPr>
+          <p:nvPr>
+            <p:ph type="title"/>
+          </p:nvPr>
+        </p:nvSpPr>
+        <p:spPr/>
+        <p:txBody>
+          <a:bodyPr/>
+          <a:lstStyle/>
+          <a:p>
+            <a:r>
+              <a:rPr lang="en-US" dirty="0" err="1"/>
+              <a:t>Elementy</a:t>
+            </a:r>
+            <a:r>
+              <a:rPr lang="en-US" dirty="0"/>
+              <a:t> </a:t>
+            </a:r>
+            <a:r>
+              <a:rPr lang="en-US" dirty="0" err="1"/>
+              <a:t>monitoringu</a:t>
+            </a:r>
+          </a:p>
+        </p:txBody>
+      </p:sp>
+      <p:sp>
+        <p:nvSpPr>
+          <p:cNvPr id="3" name="Content Placeholder 2">
+            <a:extLst>
+              <a:ext uri="{FF2B5EF4-FFF2-40B4-BE49-F238E27FC236}">
+                <a16:creationId xmlns:a16="http://schemas.microsoft.com/office/drawing/2014/main" id="{7848C8F1-1085-1C25-C6C6-F611FDA57AC1}"/>
+              </a:ext>
+            </a:extLst>
+          </p:cNvPr>
+          <p:cNvSpPr>
+            <a:spLocks noGrp="1"/>
+          </p:cNvSpPr>
+          <p:nvPr>
+            <p:ph idx="1"/>
+          </p:nvPr>
+        </p:nvSpPr>
+        <p:spPr/>
+        <p:txBody>
+          <a:bodyPr vert="horz" lIns="91440" tIns="45720" rIns="91440" bIns="45720" rtlCol="0" anchor="t">
+            <a:normAutofit/>
+          </a:bodyPr>
+          <a:lstStyle/>
+          <a:p>
+            <a:pPr marL="571500" indent="-571500">
+              <a:spcBef>
+                <a:spcPct val="0"/>
+              </a:spcBef>
+            </a:pPr>
+            <a:r>
+              <a:rPr lang="en-US" sz="4400" dirty="0" err="1">
+                <a:latin typeface="Aptos Display"/>
+                <a:hlinkClick r:id="rId2"/>
+              </a:rPr>
+              <a:t>Dashboardy</a:t>
+            </a:r>
+            <a:endParaRPr lang="en-US" err="1">
+              <a:latin typeface="Aptos" panose="020B0004020202020204"/>
+            </a:endParaRPr>
+          </a:p>
+          <a:p>
+            <a:pPr marL="571500" indent="-571500">
+              <a:spcBef>
+                <a:spcPct val="0"/>
+              </a:spcBef>
+            </a:pPr>
+            <a:r>
+              <a:rPr lang="en-US" sz="4400" dirty="0" err="1">
+                <a:latin typeface="Aptos Display"/>
+                <a:hlinkClick r:id="rId3"/>
+              </a:rPr>
+              <a:t>Alerty</a:t>
+            </a:r>
+            <a:endParaRPr lang="en-US" err="1"/>
+          </a:p>
+        </p:txBody>
+      </p:sp>
+    </p:spTree>
+    <p:extLst>
+      <p:ext uri="{BB962C8B-B14F-4D97-AF65-F5344CB8AC3E}">
+        <p14:creationId xmlns:p14="http://schemas.microsoft.com/office/powerpoint/2010/main" val="2595133770"/>
       </p:ext>
     </p:extLst>
   </p:cSld>
